--- a/docs/method_figure.pptx
+++ b/docs/method_figure.pptx
@@ -2459,7 +2459,7 @@
         </p:nvSpPr>
         <p:spPr>
           <a:xfrm>
-            <a:off x="3245329" y="5167077"/>
+            <a:off x="3430038" y="5167077"/>
             <a:ext cx="4754880" cy="292608"/>
           </a:xfrm>
           <a:prstGeom prst="rect">
